--- a/Day_8_Slides.pptx
+++ b/Day_8_Slides.pptx
@@ -6076,7 +6076,7 @@
                 </a:solidFill>
                 <a:latin typeface="Calibri"/>
               </a:rPr>
-              <a:t>Lesson 3-5 complete. On to Lesson 3-6.</a:t>
+              <a:t>Lesson 3-5 complete. On to Lesson 4-1.</a:t>
             </a:r>
           </a:p>
         </p:txBody>
